--- a/slides-pptx/05-Python_intro-builtin_datatypes.pptx
+++ b/slides-pptx/05-Python_intro-builtin_datatypes.pptx
@@ -198,43 +198,6 @@
 <file path=ppt/changesInfos/changesInfo1.xml><?xml version="1.0" encoding="utf-8"?>
 <pc:chgInfo xmlns:a="http://schemas.openxmlformats.org/drawingml/2006/main" xmlns:r="http://schemas.openxmlformats.org/officeDocument/2006/relationships" xmlns:ac="http://schemas.microsoft.com/office/drawing/2013/main/command" xmlns:pc="http://schemas.microsoft.com/office/powerpoint/2013/main/command">
   <pc:docChgLst>
-    <pc:chgData name="Frank Van Puyvelde" userId="ba4190df-4674-45fe-be59-1502c3515486" providerId="ADAL" clId="{0236B120-AC14-4AEC-BA5C-9EACBEC4EAB9}"/>
-    <pc:docChg chg="custSel addSld delSld modSld sldOrd modSection">
-      <pc:chgData name="Frank Van Puyvelde" userId="ba4190df-4674-45fe-be59-1502c3515486" providerId="ADAL" clId="{0236B120-AC14-4AEC-BA5C-9EACBEC4EAB9}" dt="2022-11-03T14:44:30.403" v="74"/>
-      <pc:docMkLst>
-        <pc:docMk/>
-      </pc:docMkLst>
-      <pc:sldChg chg="modSp mod">
-        <pc:chgData name="Frank Van Puyvelde" userId="ba4190df-4674-45fe-be59-1502c3515486" providerId="ADAL" clId="{0236B120-AC14-4AEC-BA5C-9EACBEC4EAB9}" dt="2022-11-03T14:37:11.241" v="8" actId="6549"/>
-        <pc:sldMkLst>
-          <pc:docMk/>
-          <pc:sldMk cId="3927318963" sldId="319"/>
-        </pc:sldMkLst>
-      </pc:sldChg>
-      <pc:sldChg chg="del">
-        <pc:chgData name="Frank Van Puyvelde" userId="ba4190df-4674-45fe-be59-1502c3515486" providerId="ADAL" clId="{0236B120-AC14-4AEC-BA5C-9EACBEC4EAB9}" dt="2022-11-03T14:26:56.030" v="0" actId="2696"/>
-        <pc:sldMkLst>
-          <pc:docMk/>
-          <pc:sldMk cId="2255290832" sldId="332"/>
-        </pc:sldMkLst>
-      </pc:sldChg>
-      <pc:sldChg chg="mod ord modShow">
-        <pc:chgData name="Frank Van Puyvelde" userId="ba4190df-4674-45fe-be59-1502c3515486" providerId="ADAL" clId="{0236B120-AC14-4AEC-BA5C-9EACBEC4EAB9}" dt="2022-11-03T14:44:30.403" v="74"/>
-        <pc:sldMkLst>
-          <pc:docMk/>
-          <pc:sldMk cId="1468473658" sldId="442"/>
-        </pc:sldMkLst>
-      </pc:sldChg>
-      <pc:sldChg chg="addSp delSp modSp new mod ord">
-        <pc:chgData name="Frank Van Puyvelde" userId="ba4190df-4674-45fe-be59-1502c3515486" providerId="ADAL" clId="{0236B120-AC14-4AEC-BA5C-9EACBEC4EAB9}" dt="2022-11-03T14:43:47.838" v="71"/>
-        <pc:sldMkLst>
-          <pc:docMk/>
-          <pc:sldMk cId="3851471709" sldId="453"/>
-        </pc:sldMkLst>
-      </pc:sldChg>
-    </pc:docChg>
-  </pc:docChgLst>
-  <pc:docChgLst>
     <pc:chgData name="Frank Van Puyvelde" userId="ba4190df-4674-45fe-be59-1502c3515486" providerId="ADAL" clId="{258E9A8F-DB03-4361-8EC4-20694CDF0FFB}"/>
     <pc:docChg chg="custSel modSld">
       <pc:chgData name="Frank Van Puyvelde" userId="ba4190df-4674-45fe-be59-1502c3515486" providerId="ADAL" clId="{258E9A8F-DB03-4361-8EC4-20694CDF0FFB}" dt="2024-02-08T12:14:55.999" v="15" actId="20577"/>
@@ -254,209 +217,6 @@
           <pc:docMk/>
           <pc:sldMk cId="2796170465" sldId="455"/>
         </pc:sldMkLst>
-      </pc:sldChg>
-    </pc:docChg>
-  </pc:docChgLst>
-  <pc:docChgLst>
-    <pc:chgData name="Frank Van Puyvelde" userId="ba4190df-4674-45fe-be59-1502c3515486" providerId="ADAL" clId="{B1924F0E-1ECF-452D-9225-C6D0DB1FAF3C}"/>
-    <pc:docChg chg="addSld delSld modSld modSection">
-      <pc:chgData name="Frank Van Puyvelde" userId="ba4190df-4674-45fe-be59-1502c3515486" providerId="ADAL" clId="{B1924F0E-1ECF-452D-9225-C6D0DB1FAF3C}" dt="2025-01-03T10:31:23.766" v="34" actId="47"/>
-      <pc:docMkLst>
-        <pc:docMk/>
-      </pc:docMkLst>
-      <pc:sldChg chg="modSp mod">
-        <pc:chgData name="Frank Van Puyvelde" userId="ba4190df-4674-45fe-be59-1502c3515486" providerId="ADAL" clId="{B1924F0E-1ECF-452D-9225-C6D0DB1FAF3C}" dt="2025-01-03T10:29:52.419" v="9" actId="20577"/>
-        <pc:sldMkLst>
-          <pc:docMk/>
-          <pc:sldMk cId="3619848797" sldId="256"/>
-        </pc:sldMkLst>
-      </pc:sldChg>
-      <pc:sldChg chg="del">
-        <pc:chgData name="Frank Van Puyvelde" userId="ba4190df-4674-45fe-be59-1502c3515486" providerId="ADAL" clId="{B1924F0E-1ECF-452D-9225-C6D0DB1FAF3C}" dt="2025-01-03T10:31:23.766" v="34" actId="47"/>
-        <pc:sldMkLst>
-          <pc:docMk/>
-          <pc:sldMk cId="3700607111" sldId="286"/>
-        </pc:sldMkLst>
-      </pc:sldChg>
-      <pc:sldChg chg="modSp mod">
-        <pc:chgData name="Frank Van Puyvelde" userId="ba4190df-4674-45fe-be59-1502c3515486" providerId="ADAL" clId="{B1924F0E-1ECF-452D-9225-C6D0DB1FAF3C}" dt="2025-01-03T10:30:01.236" v="19" actId="20577"/>
-        <pc:sldMkLst>
-          <pc:docMk/>
-          <pc:sldMk cId="2077647311" sldId="452"/>
-        </pc:sldMkLst>
-      </pc:sldChg>
-      <pc:sldChg chg="addSp modSp new mod">
-        <pc:chgData name="Frank Van Puyvelde" userId="ba4190df-4674-45fe-be59-1502c3515486" providerId="ADAL" clId="{B1924F0E-1ECF-452D-9225-C6D0DB1FAF3C}" dt="2025-01-03T10:31:19.469" v="33" actId="20577"/>
-        <pc:sldMkLst>
-          <pc:docMk/>
-          <pc:sldMk cId="2114649343" sldId="460"/>
-        </pc:sldMkLst>
-      </pc:sldChg>
-    </pc:docChg>
-  </pc:docChgLst>
-  <pc:docChgLst>
-    <pc:chgData name="Ehsan Moravveji" userId="21e7e8ea3c9f37f0" providerId="LiveId" clId="{2A95B265-BC73-4CCF-B8C1-7107294670EA}"/>
-    <pc:docChg chg="custSel modSld">
-      <pc:chgData name="Ehsan Moravveji" userId="21e7e8ea3c9f37f0" providerId="LiveId" clId="{2A95B265-BC73-4CCF-B8C1-7107294670EA}" dt="2025-10-10T19:40:23.603" v="222" actId="20577"/>
-      <pc:docMkLst>
-        <pc:docMk/>
-      </pc:docMkLst>
-      <pc:sldChg chg="modSp">
-        <pc:chgData name="Ehsan Moravveji" userId="21e7e8ea3c9f37f0" providerId="LiveId" clId="{2A95B265-BC73-4CCF-B8C1-7107294670EA}" dt="2025-10-10T18:32:15.580" v="83"/>
-        <pc:sldMkLst>
-          <pc:docMk/>
-          <pc:sldMk cId="956188888" sldId="314"/>
-        </pc:sldMkLst>
-        <pc:spChg chg="mod">
-          <ac:chgData name="Ehsan Moravveji" userId="21e7e8ea3c9f37f0" providerId="LiveId" clId="{2A95B265-BC73-4CCF-B8C1-7107294670EA}" dt="2025-10-10T18:32:15.580" v="83"/>
-          <ac:spMkLst>
-            <pc:docMk/>
-            <pc:sldMk cId="956188888" sldId="314"/>
-            <ac:spMk id="3" creationId="{00000000-0000-0000-0000-000000000000}"/>
-          </ac:spMkLst>
-        </pc:spChg>
-      </pc:sldChg>
-      <pc:sldChg chg="modSp">
-        <pc:chgData name="Ehsan Moravveji" userId="21e7e8ea3c9f37f0" providerId="LiveId" clId="{2A95B265-BC73-4CCF-B8C1-7107294670EA}" dt="2025-10-10T18:32:02.515" v="80"/>
-        <pc:sldMkLst>
-          <pc:docMk/>
-          <pc:sldMk cId="3563275714" sldId="315"/>
-        </pc:sldMkLst>
-        <pc:spChg chg="mod">
-          <ac:chgData name="Ehsan Moravveji" userId="21e7e8ea3c9f37f0" providerId="LiveId" clId="{2A95B265-BC73-4CCF-B8C1-7107294670EA}" dt="2025-10-10T18:32:02.515" v="80"/>
-          <ac:spMkLst>
-            <pc:docMk/>
-            <pc:sldMk cId="3563275714" sldId="315"/>
-            <ac:spMk id="3" creationId="{00000000-0000-0000-0000-000000000000}"/>
-          </ac:spMkLst>
-        </pc:spChg>
-      </pc:sldChg>
-      <pc:sldChg chg="modSp mod">
-        <pc:chgData name="Ehsan Moravveji" userId="21e7e8ea3c9f37f0" providerId="LiveId" clId="{2A95B265-BC73-4CCF-B8C1-7107294670EA}" dt="2025-10-10T19:32:57.958" v="149"/>
-        <pc:sldMkLst>
-          <pc:docMk/>
-          <pc:sldMk cId="863500734" sldId="317"/>
-        </pc:sldMkLst>
-        <pc:spChg chg="mod">
-          <ac:chgData name="Ehsan Moravveji" userId="21e7e8ea3c9f37f0" providerId="LiveId" clId="{2A95B265-BC73-4CCF-B8C1-7107294670EA}" dt="2025-10-10T19:32:57.958" v="149"/>
-          <ac:spMkLst>
-            <pc:docMk/>
-            <pc:sldMk cId="863500734" sldId="317"/>
-            <ac:spMk id="3" creationId="{00000000-0000-0000-0000-000000000000}"/>
-          </ac:spMkLst>
-        </pc:spChg>
-      </pc:sldChg>
-      <pc:sldChg chg="modSp mod">
-        <pc:chgData name="Ehsan Moravveji" userId="21e7e8ea3c9f37f0" providerId="LiveId" clId="{2A95B265-BC73-4CCF-B8C1-7107294670EA}" dt="2025-10-10T18:31:43.121" v="76"/>
-        <pc:sldMkLst>
-          <pc:docMk/>
-          <pc:sldMk cId="3880207217" sldId="318"/>
-        </pc:sldMkLst>
-        <pc:spChg chg="mod">
-          <ac:chgData name="Ehsan Moravveji" userId="21e7e8ea3c9f37f0" providerId="LiveId" clId="{2A95B265-BC73-4CCF-B8C1-7107294670EA}" dt="2025-10-10T18:31:43.121" v="76"/>
-          <ac:spMkLst>
-            <pc:docMk/>
-            <pc:sldMk cId="3880207217" sldId="318"/>
-            <ac:spMk id="3" creationId="{00000000-0000-0000-0000-000000000000}"/>
-          </ac:spMkLst>
-        </pc:spChg>
-      </pc:sldChg>
-      <pc:sldChg chg="modSp mod">
-        <pc:chgData name="Ehsan Moravveji" userId="21e7e8ea3c9f37f0" providerId="LiveId" clId="{2A95B265-BC73-4CCF-B8C1-7107294670EA}" dt="2025-10-10T19:34:21.045" v="159" actId="20577"/>
-        <pc:sldMkLst>
-          <pc:docMk/>
-          <pc:sldMk cId="710548089" sldId="319"/>
-        </pc:sldMkLst>
-        <pc:spChg chg="mod">
-          <ac:chgData name="Ehsan Moravveji" userId="21e7e8ea3c9f37f0" providerId="LiveId" clId="{2A95B265-BC73-4CCF-B8C1-7107294670EA}" dt="2025-10-10T19:34:21.045" v="159" actId="20577"/>
-          <ac:spMkLst>
-            <pc:docMk/>
-            <pc:sldMk cId="710548089" sldId="319"/>
-            <ac:spMk id="3" creationId="{00000000-0000-0000-0000-000000000000}"/>
-          </ac:spMkLst>
-        </pc:spChg>
-      </pc:sldChg>
-      <pc:sldChg chg="modSp mod">
-        <pc:chgData name="Ehsan Moravveji" userId="21e7e8ea3c9f37f0" providerId="LiveId" clId="{2A95B265-BC73-4CCF-B8C1-7107294670EA}" dt="2025-10-10T18:33:06.671" v="90" actId="20577"/>
-        <pc:sldMkLst>
-          <pc:docMk/>
-          <pc:sldMk cId="134779472" sldId="390"/>
-        </pc:sldMkLst>
-        <pc:spChg chg="mod">
-          <ac:chgData name="Ehsan Moravveji" userId="21e7e8ea3c9f37f0" providerId="LiveId" clId="{2A95B265-BC73-4CCF-B8C1-7107294670EA}" dt="2025-10-10T18:33:06.671" v="90" actId="20577"/>
-          <ac:spMkLst>
-            <pc:docMk/>
-            <pc:sldMk cId="134779472" sldId="390"/>
-            <ac:spMk id="3" creationId="{00000000-0000-0000-0000-000000000000}"/>
-          </ac:spMkLst>
-        </pc:spChg>
-      </pc:sldChg>
-      <pc:sldChg chg="mod modShow">
-        <pc:chgData name="Ehsan Moravveji" userId="21e7e8ea3c9f37f0" providerId="LiveId" clId="{2A95B265-BC73-4CCF-B8C1-7107294670EA}" dt="2025-10-10T17:56:47.782" v="0" actId="729"/>
-        <pc:sldMkLst>
-          <pc:docMk/>
-          <pc:sldMk cId="4024688066" sldId="422"/>
-        </pc:sldMkLst>
-      </pc:sldChg>
-      <pc:sldChg chg="modSp mod">
-        <pc:chgData name="Ehsan Moravveji" userId="21e7e8ea3c9f37f0" providerId="LiveId" clId="{2A95B265-BC73-4CCF-B8C1-7107294670EA}" dt="2025-10-10T19:40:23.603" v="222" actId="20577"/>
-        <pc:sldMkLst>
-          <pc:docMk/>
-          <pc:sldMk cId="3851471709" sldId="453"/>
-        </pc:sldMkLst>
-        <pc:spChg chg="mod">
-          <ac:chgData name="Ehsan Moravveji" userId="21e7e8ea3c9f37f0" providerId="LiveId" clId="{2A95B265-BC73-4CCF-B8C1-7107294670EA}" dt="2025-10-10T19:40:23.603" v="222" actId="20577"/>
-          <ac:spMkLst>
-            <pc:docMk/>
-            <pc:sldMk cId="3851471709" sldId="453"/>
-            <ac:spMk id="3" creationId="{7D2A59F1-5CF0-4F50-AF43-2602773930DC}"/>
-          </ac:spMkLst>
-        </pc:spChg>
-      </pc:sldChg>
-      <pc:sldChg chg="modSp mod">
-        <pc:chgData name="Ehsan Moravveji" userId="21e7e8ea3c9f37f0" providerId="LiveId" clId="{2A95B265-BC73-4CCF-B8C1-7107294670EA}" dt="2025-10-10T18:31:17.906" v="67" actId="20577"/>
-        <pc:sldMkLst>
-          <pc:docMk/>
-          <pc:sldMk cId="2174593376" sldId="456"/>
-        </pc:sldMkLst>
-        <pc:spChg chg="mod">
-          <ac:chgData name="Ehsan Moravveji" userId="21e7e8ea3c9f37f0" providerId="LiveId" clId="{2A95B265-BC73-4CCF-B8C1-7107294670EA}" dt="2025-10-10T18:31:17.906" v="67" actId="20577"/>
-          <ac:spMkLst>
-            <pc:docMk/>
-            <pc:sldMk cId="2174593376" sldId="456"/>
-            <ac:spMk id="3" creationId="{AC169C64-1E34-C7A6-D0FB-99BF3231F6BC}"/>
-          </ac:spMkLst>
-        </pc:spChg>
-      </pc:sldChg>
-      <pc:sldChg chg="modSp mod">
-        <pc:chgData name="Ehsan Moravveji" userId="21e7e8ea3c9f37f0" providerId="LiveId" clId="{2A95B265-BC73-4CCF-B8C1-7107294670EA}" dt="2025-10-10T19:13:08.581" v="109" actId="20577"/>
-        <pc:sldMkLst>
-          <pc:docMk/>
-          <pc:sldMk cId="913145327" sldId="458"/>
-        </pc:sldMkLst>
-        <pc:graphicFrameChg chg="modGraphic">
-          <ac:chgData name="Ehsan Moravveji" userId="21e7e8ea3c9f37f0" providerId="LiveId" clId="{2A95B265-BC73-4CCF-B8C1-7107294670EA}" dt="2025-10-10T19:13:08.581" v="109" actId="20577"/>
-          <ac:graphicFrameMkLst>
-            <pc:docMk/>
-            <pc:sldMk cId="913145327" sldId="458"/>
-            <ac:graphicFrameMk id="4" creationId="{147AE311-2E36-46A2-DA9B-07DCEC710B72}"/>
-          </ac:graphicFrameMkLst>
-        </pc:graphicFrameChg>
-      </pc:sldChg>
-      <pc:sldChg chg="modSp mod">
-        <pc:chgData name="Ehsan Moravveji" userId="21e7e8ea3c9f37f0" providerId="LiveId" clId="{2A95B265-BC73-4CCF-B8C1-7107294670EA}" dt="2025-10-10T18:38:56.597" v="101" actId="20577"/>
-        <pc:sldMkLst>
-          <pc:docMk/>
-          <pc:sldMk cId="1540948237" sldId="459"/>
-        </pc:sldMkLst>
-        <pc:spChg chg="mod">
-          <ac:chgData name="Ehsan Moravveji" userId="21e7e8ea3c9f37f0" providerId="LiveId" clId="{2A95B265-BC73-4CCF-B8C1-7107294670EA}" dt="2025-10-10T18:38:56.597" v="101" actId="20577"/>
-          <ac:spMkLst>
-            <pc:docMk/>
-            <pc:sldMk cId="1540948237" sldId="459"/>
-            <ac:spMk id="3" creationId="{DD71C84C-5334-321E-D0BA-1F66A9B9D2D9}"/>
-          </ac:spMkLst>
-        </pc:spChg>
       </pc:sldChg>
     </pc:docChg>
   </pc:docChgLst>
@@ -630,6 +390,246 @@
       </pc:sldChg>
     </pc:docChg>
   </pc:docChgLst>
+  <pc:docChgLst>
+    <pc:chgData name="Frank Van Puyvelde" userId="ba4190df-4674-45fe-be59-1502c3515486" providerId="ADAL" clId="{B1924F0E-1ECF-452D-9225-C6D0DB1FAF3C}"/>
+    <pc:docChg chg="addSld delSld modSld modSection">
+      <pc:chgData name="Frank Van Puyvelde" userId="ba4190df-4674-45fe-be59-1502c3515486" providerId="ADAL" clId="{B1924F0E-1ECF-452D-9225-C6D0DB1FAF3C}" dt="2025-01-03T10:31:23.766" v="34" actId="47"/>
+      <pc:docMkLst>
+        <pc:docMk/>
+      </pc:docMkLst>
+      <pc:sldChg chg="modSp mod">
+        <pc:chgData name="Frank Van Puyvelde" userId="ba4190df-4674-45fe-be59-1502c3515486" providerId="ADAL" clId="{B1924F0E-1ECF-452D-9225-C6D0DB1FAF3C}" dt="2025-01-03T10:29:52.419" v="9" actId="20577"/>
+        <pc:sldMkLst>
+          <pc:docMk/>
+          <pc:sldMk cId="3619848797" sldId="256"/>
+        </pc:sldMkLst>
+      </pc:sldChg>
+      <pc:sldChg chg="del">
+        <pc:chgData name="Frank Van Puyvelde" userId="ba4190df-4674-45fe-be59-1502c3515486" providerId="ADAL" clId="{B1924F0E-1ECF-452D-9225-C6D0DB1FAF3C}" dt="2025-01-03T10:31:23.766" v="34" actId="47"/>
+        <pc:sldMkLst>
+          <pc:docMk/>
+          <pc:sldMk cId="3700607111" sldId="286"/>
+        </pc:sldMkLst>
+      </pc:sldChg>
+      <pc:sldChg chg="modSp mod">
+        <pc:chgData name="Frank Van Puyvelde" userId="ba4190df-4674-45fe-be59-1502c3515486" providerId="ADAL" clId="{B1924F0E-1ECF-452D-9225-C6D0DB1FAF3C}" dt="2025-01-03T10:30:01.236" v="19" actId="20577"/>
+        <pc:sldMkLst>
+          <pc:docMk/>
+          <pc:sldMk cId="2077647311" sldId="452"/>
+        </pc:sldMkLst>
+      </pc:sldChg>
+      <pc:sldChg chg="addSp modSp new mod">
+        <pc:chgData name="Frank Van Puyvelde" userId="ba4190df-4674-45fe-be59-1502c3515486" providerId="ADAL" clId="{B1924F0E-1ECF-452D-9225-C6D0DB1FAF3C}" dt="2025-01-03T10:31:19.469" v="33" actId="20577"/>
+        <pc:sldMkLst>
+          <pc:docMk/>
+          <pc:sldMk cId="2114649343" sldId="460"/>
+        </pc:sldMkLst>
+      </pc:sldChg>
+    </pc:docChg>
+  </pc:docChgLst>
+  <pc:docChgLst>
+    <pc:chgData name="Frank Van Puyvelde" userId="ba4190df-4674-45fe-be59-1502c3515486" providerId="ADAL" clId="{0236B120-AC14-4AEC-BA5C-9EACBEC4EAB9}"/>
+    <pc:docChg chg="custSel addSld delSld modSld sldOrd modSection">
+      <pc:chgData name="Frank Van Puyvelde" userId="ba4190df-4674-45fe-be59-1502c3515486" providerId="ADAL" clId="{0236B120-AC14-4AEC-BA5C-9EACBEC4EAB9}" dt="2022-11-03T14:44:30.403" v="74"/>
+      <pc:docMkLst>
+        <pc:docMk/>
+      </pc:docMkLst>
+      <pc:sldChg chg="modSp mod">
+        <pc:chgData name="Frank Van Puyvelde" userId="ba4190df-4674-45fe-be59-1502c3515486" providerId="ADAL" clId="{0236B120-AC14-4AEC-BA5C-9EACBEC4EAB9}" dt="2022-11-03T14:37:11.241" v="8" actId="6549"/>
+        <pc:sldMkLst>
+          <pc:docMk/>
+          <pc:sldMk cId="3927318963" sldId="319"/>
+        </pc:sldMkLst>
+      </pc:sldChg>
+      <pc:sldChg chg="del">
+        <pc:chgData name="Frank Van Puyvelde" userId="ba4190df-4674-45fe-be59-1502c3515486" providerId="ADAL" clId="{0236B120-AC14-4AEC-BA5C-9EACBEC4EAB9}" dt="2022-11-03T14:26:56.030" v="0" actId="2696"/>
+        <pc:sldMkLst>
+          <pc:docMk/>
+          <pc:sldMk cId="2255290832" sldId="332"/>
+        </pc:sldMkLst>
+      </pc:sldChg>
+      <pc:sldChg chg="mod ord modShow">
+        <pc:chgData name="Frank Van Puyvelde" userId="ba4190df-4674-45fe-be59-1502c3515486" providerId="ADAL" clId="{0236B120-AC14-4AEC-BA5C-9EACBEC4EAB9}" dt="2022-11-03T14:44:30.403" v="74"/>
+        <pc:sldMkLst>
+          <pc:docMk/>
+          <pc:sldMk cId="1468473658" sldId="442"/>
+        </pc:sldMkLst>
+      </pc:sldChg>
+      <pc:sldChg chg="addSp delSp modSp new mod ord">
+        <pc:chgData name="Frank Van Puyvelde" userId="ba4190df-4674-45fe-be59-1502c3515486" providerId="ADAL" clId="{0236B120-AC14-4AEC-BA5C-9EACBEC4EAB9}" dt="2022-11-03T14:43:47.838" v="71"/>
+        <pc:sldMkLst>
+          <pc:docMk/>
+          <pc:sldMk cId="3851471709" sldId="453"/>
+        </pc:sldMkLst>
+      </pc:sldChg>
+    </pc:docChg>
+  </pc:docChgLst>
+  <pc:docChgLst>
+    <pc:chgData name="Ehsan Moravveji" userId="21e7e8ea3c9f37f0" providerId="LiveId" clId="{2A95B265-BC73-4CCF-B8C1-7107294670EA}"/>
+    <pc:docChg chg="custSel modSld">
+      <pc:chgData name="Ehsan Moravveji" userId="21e7e8ea3c9f37f0" providerId="LiveId" clId="{2A95B265-BC73-4CCF-B8C1-7107294670EA}" dt="2025-10-10T19:40:23.603" v="222" actId="20577"/>
+      <pc:docMkLst>
+        <pc:docMk/>
+      </pc:docMkLst>
+      <pc:sldChg chg="modSp">
+        <pc:chgData name="Ehsan Moravveji" userId="21e7e8ea3c9f37f0" providerId="LiveId" clId="{2A95B265-BC73-4CCF-B8C1-7107294670EA}" dt="2025-10-10T18:32:15.580" v="83"/>
+        <pc:sldMkLst>
+          <pc:docMk/>
+          <pc:sldMk cId="956188888" sldId="314"/>
+        </pc:sldMkLst>
+        <pc:spChg chg="mod">
+          <ac:chgData name="Ehsan Moravveji" userId="21e7e8ea3c9f37f0" providerId="LiveId" clId="{2A95B265-BC73-4CCF-B8C1-7107294670EA}" dt="2025-10-10T18:32:15.580" v="83"/>
+          <ac:spMkLst>
+            <pc:docMk/>
+            <pc:sldMk cId="956188888" sldId="314"/>
+            <ac:spMk id="3" creationId="{00000000-0000-0000-0000-000000000000}"/>
+          </ac:spMkLst>
+        </pc:spChg>
+      </pc:sldChg>
+      <pc:sldChg chg="modSp">
+        <pc:chgData name="Ehsan Moravveji" userId="21e7e8ea3c9f37f0" providerId="LiveId" clId="{2A95B265-BC73-4CCF-B8C1-7107294670EA}" dt="2025-10-10T18:32:02.515" v="80"/>
+        <pc:sldMkLst>
+          <pc:docMk/>
+          <pc:sldMk cId="3563275714" sldId="315"/>
+        </pc:sldMkLst>
+        <pc:spChg chg="mod">
+          <ac:chgData name="Ehsan Moravveji" userId="21e7e8ea3c9f37f0" providerId="LiveId" clId="{2A95B265-BC73-4CCF-B8C1-7107294670EA}" dt="2025-10-10T18:32:02.515" v="80"/>
+          <ac:spMkLst>
+            <pc:docMk/>
+            <pc:sldMk cId="3563275714" sldId="315"/>
+            <ac:spMk id="3" creationId="{00000000-0000-0000-0000-000000000000}"/>
+          </ac:spMkLst>
+        </pc:spChg>
+      </pc:sldChg>
+      <pc:sldChg chg="modSp mod">
+        <pc:chgData name="Ehsan Moravveji" userId="21e7e8ea3c9f37f0" providerId="LiveId" clId="{2A95B265-BC73-4CCF-B8C1-7107294670EA}" dt="2025-10-10T19:32:57.958" v="149"/>
+        <pc:sldMkLst>
+          <pc:docMk/>
+          <pc:sldMk cId="863500734" sldId="317"/>
+        </pc:sldMkLst>
+        <pc:spChg chg="mod">
+          <ac:chgData name="Ehsan Moravveji" userId="21e7e8ea3c9f37f0" providerId="LiveId" clId="{2A95B265-BC73-4CCF-B8C1-7107294670EA}" dt="2025-10-10T19:32:57.958" v="149"/>
+          <ac:spMkLst>
+            <pc:docMk/>
+            <pc:sldMk cId="863500734" sldId="317"/>
+            <ac:spMk id="3" creationId="{00000000-0000-0000-0000-000000000000}"/>
+          </ac:spMkLst>
+        </pc:spChg>
+      </pc:sldChg>
+      <pc:sldChg chg="modSp mod">
+        <pc:chgData name="Ehsan Moravveji" userId="21e7e8ea3c9f37f0" providerId="LiveId" clId="{2A95B265-BC73-4CCF-B8C1-7107294670EA}" dt="2025-10-10T18:31:43.121" v="76"/>
+        <pc:sldMkLst>
+          <pc:docMk/>
+          <pc:sldMk cId="3880207217" sldId="318"/>
+        </pc:sldMkLst>
+        <pc:spChg chg="mod">
+          <ac:chgData name="Ehsan Moravveji" userId="21e7e8ea3c9f37f0" providerId="LiveId" clId="{2A95B265-BC73-4CCF-B8C1-7107294670EA}" dt="2025-10-10T18:31:43.121" v="76"/>
+          <ac:spMkLst>
+            <pc:docMk/>
+            <pc:sldMk cId="3880207217" sldId="318"/>
+            <ac:spMk id="3" creationId="{00000000-0000-0000-0000-000000000000}"/>
+          </ac:spMkLst>
+        </pc:spChg>
+      </pc:sldChg>
+      <pc:sldChg chg="modSp mod">
+        <pc:chgData name="Ehsan Moravveji" userId="21e7e8ea3c9f37f0" providerId="LiveId" clId="{2A95B265-BC73-4CCF-B8C1-7107294670EA}" dt="2025-10-10T19:34:21.045" v="159" actId="20577"/>
+        <pc:sldMkLst>
+          <pc:docMk/>
+          <pc:sldMk cId="710548089" sldId="319"/>
+        </pc:sldMkLst>
+        <pc:spChg chg="mod">
+          <ac:chgData name="Ehsan Moravveji" userId="21e7e8ea3c9f37f0" providerId="LiveId" clId="{2A95B265-BC73-4CCF-B8C1-7107294670EA}" dt="2025-10-10T19:34:21.045" v="159" actId="20577"/>
+          <ac:spMkLst>
+            <pc:docMk/>
+            <pc:sldMk cId="710548089" sldId="319"/>
+            <ac:spMk id="3" creationId="{00000000-0000-0000-0000-000000000000}"/>
+          </ac:spMkLst>
+        </pc:spChg>
+      </pc:sldChg>
+      <pc:sldChg chg="modSp mod">
+        <pc:chgData name="Ehsan Moravveji" userId="21e7e8ea3c9f37f0" providerId="LiveId" clId="{2A95B265-BC73-4CCF-B8C1-7107294670EA}" dt="2025-10-10T18:33:06.671" v="90" actId="20577"/>
+        <pc:sldMkLst>
+          <pc:docMk/>
+          <pc:sldMk cId="134779472" sldId="390"/>
+        </pc:sldMkLst>
+        <pc:spChg chg="mod">
+          <ac:chgData name="Ehsan Moravveji" userId="21e7e8ea3c9f37f0" providerId="LiveId" clId="{2A95B265-BC73-4CCF-B8C1-7107294670EA}" dt="2025-10-10T18:33:06.671" v="90" actId="20577"/>
+          <ac:spMkLst>
+            <pc:docMk/>
+            <pc:sldMk cId="134779472" sldId="390"/>
+            <ac:spMk id="3" creationId="{00000000-0000-0000-0000-000000000000}"/>
+          </ac:spMkLst>
+        </pc:spChg>
+      </pc:sldChg>
+      <pc:sldChg chg="mod modShow">
+        <pc:chgData name="Ehsan Moravveji" userId="21e7e8ea3c9f37f0" providerId="LiveId" clId="{2A95B265-BC73-4CCF-B8C1-7107294670EA}" dt="2025-10-10T17:56:47.782" v="0" actId="729"/>
+        <pc:sldMkLst>
+          <pc:docMk/>
+          <pc:sldMk cId="4024688066" sldId="422"/>
+        </pc:sldMkLst>
+      </pc:sldChg>
+      <pc:sldChg chg="modSp mod">
+        <pc:chgData name="Ehsan Moravveji" userId="21e7e8ea3c9f37f0" providerId="LiveId" clId="{2A95B265-BC73-4CCF-B8C1-7107294670EA}" dt="2025-10-10T19:40:23.603" v="222" actId="20577"/>
+        <pc:sldMkLst>
+          <pc:docMk/>
+          <pc:sldMk cId="3851471709" sldId="453"/>
+        </pc:sldMkLst>
+        <pc:spChg chg="mod">
+          <ac:chgData name="Ehsan Moravveji" userId="21e7e8ea3c9f37f0" providerId="LiveId" clId="{2A95B265-BC73-4CCF-B8C1-7107294670EA}" dt="2025-10-10T19:40:23.603" v="222" actId="20577"/>
+          <ac:spMkLst>
+            <pc:docMk/>
+            <pc:sldMk cId="3851471709" sldId="453"/>
+            <ac:spMk id="3" creationId="{7D2A59F1-5CF0-4F50-AF43-2602773930DC}"/>
+          </ac:spMkLst>
+        </pc:spChg>
+      </pc:sldChg>
+      <pc:sldChg chg="modSp mod">
+        <pc:chgData name="Ehsan Moravveji" userId="21e7e8ea3c9f37f0" providerId="LiveId" clId="{2A95B265-BC73-4CCF-B8C1-7107294670EA}" dt="2025-10-10T18:31:17.906" v="67" actId="20577"/>
+        <pc:sldMkLst>
+          <pc:docMk/>
+          <pc:sldMk cId="2174593376" sldId="456"/>
+        </pc:sldMkLst>
+        <pc:spChg chg="mod">
+          <ac:chgData name="Ehsan Moravveji" userId="21e7e8ea3c9f37f0" providerId="LiveId" clId="{2A95B265-BC73-4CCF-B8C1-7107294670EA}" dt="2025-10-10T18:31:17.906" v="67" actId="20577"/>
+          <ac:spMkLst>
+            <pc:docMk/>
+            <pc:sldMk cId="2174593376" sldId="456"/>
+            <ac:spMk id="3" creationId="{AC169C64-1E34-C7A6-D0FB-99BF3231F6BC}"/>
+          </ac:spMkLst>
+        </pc:spChg>
+      </pc:sldChg>
+      <pc:sldChg chg="modSp mod">
+        <pc:chgData name="Ehsan Moravveji" userId="21e7e8ea3c9f37f0" providerId="LiveId" clId="{2A95B265-BC73-4CCF-B8C1-7107294670EA}" dt="2025-10-10T19:13:08.581" v="109" actId="20577"/>
+        <pc:sldMkLst>
+          <pc:docMk/>
+          <pc:sldMk cId="913145327" sldId="458"/>
+        </pc:sldMkLst>
+        <pc:graphicFrameChg chg="modGraphic">
+          <ac:chgData name="Ehsan Moravveji" userId="21e7e8ea3c9f37f0" providerId="LiveId" clId="{2A95B265-BC73-4CCF-B8C1-7107294670EA}" dt="2025-10-10T19:13:08.581" v="109" actId="20577"/>
+          <ac:graphicFrameMkLst>
+            <pc:docMk/>
+            <pc:sldMk cId="913145327" sldId="458"/>
+            <ac:graphicFrameMk id="4" creationId="{147AE311-2E36-46A2-DA9B-07DCEC710B72}"/>
+          </ac:graphicFrameMkLst>
+        </pc:graphicFrameChg>
+      </pc:sldChg>
+      <pc:sldChg chg="modSp mod">
+        <pc:chgData name="Ehsan Moravveji" userId="21e7e8ea3c9f37f0" providerId="LiveId" clId="{2A95B265-BC73-4CCF-B8C1-7107294670EA}" dt="2025-10-10T18:38:56.597" v="101" actId="20577"/>
+        <pc:sldMkLst>
+          <pc:docMk/>
+          <pc:sldMk cId="1540948237" sldId="459"/>
+        </pc:sldMkLst>
+        <pc:spChg chg="mod">
+          <ac:chgData name="Ehsan Moravveji" userId="21e7e8ea3c9f37f0" providerId="LiveId" clId="{2A95B265-BC73-4CCF-B8C1-7107294670EA}" dt="2025-10-10T18:38:56.597" v="101" actId="20577"/>
+          <ac:spMkLst>
+            <pc:docMk/>
+            <pc:sldMk cId="1540948237" sldId="459"/>
+            <ac:spMk id="3" creationId="{DD71C84C-5334-321E-D0BA-1F66A9B9D2D9}"/>
+          </ac:spMkLst>
+        </pc:spChg>
+      </pc:sldChg>
+    </pc:docChg>
+  </pc:docChgLst>
 </pc:chgInfo>
 </file>
 
@@ -748,7 +748,7 @@
           <a:p>
             <a:fld id="{7A375BC9-5AAE-4E1F-9FAE-BC04149B1DB3}" type="datetimeFigureOut">
               <a:rPr lang="nl-BE" smtClean="0"/>
-              <a:t>10/10/2025</a:t>
+              <a:t>2/10/2026</a:t>
             </a:fld>
             <a:endParaRPr lang="nl-BE"/>
           </a:p>
@@ -1231,7 +1231,7 @@
           <a:p>
             <a:fld id="{25D4C14B-8B81-49E7-9BC7-8AE29B5E2ADB}" type="datetimeFigureOut">
               <a:rPr lang="nl-BE" smtClean="0"/>
-              <a:t>10/10/2025</a:t>
+              <a:t>2/10/2026</a:t>
             </a:fld>
             <a:endParaRPr lang="nl-BE"/>
           </a:p>
@@ -1401,7 +1401,7 @@
           <a:p>
             <a:fld id="{25D4C14B-8B81-49E7-9BC7-8AE29B5E2ADB}" type="datetimeFigureOut">
               <a:rPr lang="nl-BE" smtClean="0"/>
-              <a:t>10/10/2025</a:t>
+              <a:t>2/10/2026</a:t>
             </a:fld>
             <a:endParaRPr lang="nl-BE"/>
           </a:p>
@@ -1581,7 +1581,7 @@
           <a:p>
             <a:fld id="{25D4C14B-8B81-49E7-9BC7-8AE29B5E2ADB}" type="datetimeFigureOut">
               <a:rPr lang="nl-BE" smtClean="0"/>
-              <a:t>10/10/2025</a:t>
+              <a:t>2/10/2026</a:t>
             </a:fld>
             <a:endParaRPr lang="nl-BE"/>
           </a:p>
@@ -1751,7 +1751,7 @@
           <a:p>
             <a:fld id="{25D4C14B-8B81-49E7-9BC7-8AE29B5E2ADB}" type="datetimeFigureOut">
               <a:rPr lang="nl-BE" smtClean="0"/>
-              <a:t>10/10/2025</a:t>
+              <a:t>2/10/2026</a:t>
             </a:fld>
             <a:endParaRPr lang="nl-BE"/>
           </a:p>
@@ -1997,7 +1997,7 @@
           <a:p>
             <a:fld id="{25D4C14B-8B81-49E7-9BC7-8AE29B5E2ADB}" type="datetimeFigureOut">
               <a:rPr lang="nl-BE" smtClean="0"/>
-              <a:t>10/10/2025</a:t>
+              <a:t>2/10/2026</a:t>
             </a:fld>
             <a:endParaRPr lang="nl-BE"/>
           </a:p>
@@ -2229,7 +2229,7 @@
           <a:p>
             <a:fld id="{25D4C14B-8B81-49E7-9BC7-8AE29B5E2ADB}" type="datetimeFigureOut">
               <a:rPr lang="nl-BE" smtClean="0"/>
-              <a:t>10/10/2025</a:t>
+              <a:t>2/10/2026</a:t>
             </a:fld>
             <a:endParaRPr lang="nl-BE"/>
           </a:p>
@@ -2596,7 +2596,7 @@
           <a:p>
             <a:fld id="{25D4C14B-8B81-49E7-9BC7-8AE29B5E2ADB}" type="datetimeFigureOut">
               <a:rPr lang="nl-BE" smtClean="0"/>
-              <a:t>10/10/2025</a:t>
+              <a:t>2/10/2026</a:t>
             </a:fld>
             <a:endParaRPr lang="nl-BE"/>
           </a:p>
@@ -2714,7 +2714,7 @@
           <a:p>
             <a:fld id="{25D4C14B-8B81-49E7-9BC7-8AE29B5E2ADB}" type="datetimeFigureOut">
               <a:rPr lang="nl-BE" smtClean="0"/>
-              <a:t>10/10/2025</a:t>
+              <a:t>2/10/2026</a:t>
             </a:fld>
             <a:endParaRPr lang="nl-BE"/>
           </a:p>
@@ -2809,7 +2809,7 @@
           <a:p>
             <a:fld id="{25D4C14B-8B81-49E7-9BC7-8AE29B5E2ADB}" type="datetimeFigureOut">
               <a:rPr lang="nl-BE" smtClean="0"/>
-              <a:t>10/10/2025</a:t>
+              <a:t>2/10/2026</a:t>
             </a:fld>
             <a:endParaRPr lang="nl-BE"/>
           </a:p>
@@ -3086,7 +3086,7 @@
           <a:p>
             <a:fld id="{25D4C14B-8B81-49E7-9BC7-8AE29B5E2ADB}" type="datetimeFigureOut">
               <a:rPr lang="nl-BE" smtClean="0"/>
-              <a:t>10/10/2025</a:t>
+              <a:t>2/10/2026</a:t>
             </a:fld>
             <a:endParaRPr lang="nl-BE"/>
           </a:p>
@@ -3339,7 +3339,7 @@
           <a:p>
             <a:fld id="{25D4C14B-8B81-49E7-9BC7-8AE29B5E2ADB}" type="datetimeFigureOut">
               <a:rPr lang="nl-BE" smtClean="0"/>
-              <a:t>10/10/2025</a:t>
+              <a:t>2/10/2026</a:t>
             </a:fld>
             <a:endParaRPr lang="nl-BE"/>
           </a:p>
@@ -3552,7 +3552,7 @@
           <a:p>
             <a:fld id="{25D4C14B-8B81-49E7-9BC7-8AE29B5E2ADB}" type="datetimeFigureOut">
               <a:rPr lang="nl-BE" smtClean="0"/>
-              <a:t>10/10/2025</a:t>
+              <a:t>2/10/2026</a:t>
             </a:fld>
             <a:endParaRPr lang="nl-BE"/>
           </a:p>
@@ -13205,11 +13205,11 @@
   <p:clrMapOvr>
     <a:masterClrMapping/>
   </p:clrMapOvr>
-  <mc:AlternateContent xmlns:mc="http://schemas.openxmlformats.org/markup-compatibility/2006">
-    <mc:Choice xmlns:p14="http://schemas.microsoft.com/office/powerpoint/2010/main" Requires="p14">
+  <mc:AlternateContent xmlns:mc="http://schemas.openxmlformats.org/markup-compatibility/2006" xmlns:p14="http://schemas.microsoft.com/office/powerpoint/2010/main">
+    <mc:Choice Requires="p14">
       <p:transition spd="slow" p14:dur="2000" advTm="28806"/>
     </mc:Choice>
-    <mc:Fallback>
+    <mc:Fallback xmlns="">
       <p:transition spd="slow" advTm="28806"/>
     </mc:Fallback>
   </mc:AlternateContent>
